--- a/public/fun/pack/pptx/wedding/결혼식_28_식순중심_감나무집.pptx
+++ b/public/fun/pack/pptx/wedding/결혼식_28_식순중심_감나무집.pptx
@@ -3286,6 +3286,14 @@
 <file path=ppt/slides/slide1.xml><?xml version="1.0" encoding="utf-8"?>
 <p:sld xmlns:a="http://schemas.openxmlformats.org/drawingml/2006/main" xmlns:p="http://schemas.openxmlformats.org/presentationml/2006/main" xmlns:r="http://schemas.openxmlformats.org/officeDocument/2006/relationships">
   <p:cSld>
+    <p:bg>
+      <p:bgPr>
+        <a:solidFill>
+          <a:srgbClr val="FBF3EC"/>
+        </a:solidFill>
+        <a:effectLst/>
+      </p:bgPr>
+    </p:bg>
     <p:spTree>
       <p:nvGrpSpPr>
         <p:cNvPr id="1" name=""/>
@@ -3293,30 +3301,119 @@
         <p:nvPr/>
       </p:nvGrpSpPr>
       <p:grpSpPr/>
-      <p:pic>
-        <p:nvPicPr>
-          <p:cNvPr id="3" name="표지 그림" descr="wedding-28.jpg"/>
-          <p:cNvPicPr>
-            <a:picLocks noChangeAspect="1"/>
-          </p:cNvPicPr>
+      <p:sp>
+        <p:nvSpPr>
+          <p:cNvPr id="3" name="사진 자리"/>
+          <p:cNvSpPr/>
           <p:nvPr/>
-        </p:nvPicPr>
-        <p:blipFill>
-          <a:blip r:embed="rId2"/>
-          <a:stretch>
-            <a:fillRect/>
-          </a:stretch>
-        </p:blipFill>
-        <p:spPr>
-          <a:xfrm>
-            <a:off x="0" y="0"/>
-            <a:ext cx="12191695" cy="6858000"/>
+        </p:nvSpPr>
+        <p:spPr>
+          <a:xfrm>
+            <a:off x="7558851" y="685800"/>
+            <a:ext cx="3169840" cy="5486400"/>
+          </a:xfrm>
+          <a:prstGeom prst="round2SameRect">
+            <a:avLst>
+              <a:gd name="adj1" fmla="val 50000"/>
+              <a:gd name="adj2" fmla="val 0"/>
+            </a:avLst>
+          </a:prstGeom>
+          <a:solidFill>
+            <a:srgbClr val="EBCAAD"/>
+          </a:solidFill>
+          <a:ln>
+            <a:noFill/>
+          </a:ln>
+        </p:spPr>
+        <p:txBody>
+          <a:bodyPr rtlCol="0" anchor="ctr" wrap="square" lIns="54864" rIns="54864" tIns="27432" bIns="27432">
+            <a:noAutofit/>
+          </a:bodyPr>
+          <a:lstStyle/>
+          <a:p>
+            <a:pPr algn="ctr">
+              <a:lnSpc>
+                <a:spcPct val="100000"/>
+              </a:lnSpc>
+            </a:pPr>
+            <a:r>
+              <a:rPr sz="1400" b="0" i="0">
+                <a:solidFill>
+                  <a:srgbClr val="493727"/>
+                </a:solidFill>
+              </a:rPr>
+              <a:t>사진을 넣어 주세요</a:t>
+            </a:r>
+          </a:p>
+        </p:txBody>
+      </p:sp>
+      <p:sp>
+        <p:nvSpPr>
+          <p:cNvPr id="4" name="장식"/>
+          <p:cNvSpPr/>
+          <p:nvPr/>
+        </p:nvSpPr>
+        <p:spPr>
+          <a:xfrm>
+            <a:off x="6827349" y="4251960"/>
+            <a:ext cx="1005840" cy="1005840"/>
+          </a:xfrm>
+          <a:prstGeom prst="ellipse">
+            <a:avLst/>
+          </a:prstGeom>
+          <a:solidFill>
+            <a:srgbClr val="EBCAAD"/>
+          </a:solidFill>
+          <a:ln>
+            <a:noFill/>
+          </a:ln>
+        </p:spPr>
+        <p:txBody>
+          <a:bodyPr rtlCol="0" anchor="ctr"/>
+          <a:lstStyle/>
+          <a:p>
+            <a:pPr algn="ctr"/>
+          </a:p>
+        </p:txBody>
+      </p:sp>
+      <p:sp>
+        <p:nvSpPr>
+          <p:cNvPr id="5" name="라벨"/>
+          <p:cNvSpPr txBox="1"/>
+          <p:nvPr/>
+        </p:nvSpPr>
+        <p:spPr>
+          <a:xfrm>
+            <a:off x="822960" y="2148840"/>
+            <a:ext cx="5608179" cy="274320"/>
           </a:xfrm>
           <a:prstGeom prst="rect">
             <a:avLst/>
           </a:prstGeom>
-        </p:spPr>
-      </p:pic>
+          <a:noFill/>
+        </p:spPr>
+        <p:txBody>
+          <a:bodyPr wrap="square" lIns="54864" rIns="54864" tIns="27432" bIns="27432" anchor="t">
+            <a:noAutofit/>
+          </a:bodyPr>
+          <a:lstStyle/>
+          <a:p>
+            <a:pPr algn="l">
+              <a:lnSpc>
+                <a:spcPct val="115000"/>
+              </a:lnSpc>
+            </a:pPr>
+            <a:r>
+              <a:rPr sz="1000" b="1" i="0" spc="250">
+                <a:solidFill>
+                  <a:srgbClr val="26231F"/>
+                </a:solidFill>
+              </a:rPr>
+              <a:t>WEDDING</a:t>
+            </a:r>
+          </a:p>
+        </p:txBody>
+      </p:sp>
       <p:sp>
         <p:nvSpPr>
           <p:cNvPr id="2" name="Title 1"/>
@@ -3329,8 +3426,8 @@
         </p:nvSpPr>
         <p:spPr>
           <a:xfrm>
-            <a:off x="853418" y="2057400"/>
-            <a:ext cx="6095847" cy="1554480"/>
+            <a:off x="822960" y="2606040"/>
+            <a:ext cx="5608179" cy="1188720"/>
           </a:xfrm>
         </p:spPr>
         <p:txBody>
@@ -3347,7 +3444,7 @@
             <a:r>
               <a:rPr sz="3600" b="1" i="0">
                 <a:solidFill>
-                  <a:srgbClr val="723F13"/>
+                  <a:srgbClr val="26231F"/>
                 </a:solidFill>
               </a:rPr>
               <a:t>저희 결혼합니다</a:t>
@@ -3357,14 +3454,14 @@
       </p:sp>
       <p:sp>
         <p:nvSpPr>
-          <p:cNvPr id="4" name="한 줄 문구"/>
+          <p:cNvPr id="6" name="한 줄 문구"/>
           <p:cNvSpPr txBox="1"/>
           <p:nvPr/>
         </p:nvSpPr>
         <p:spPr>
           <a:xfrm>
-            <a:off x="853418" y="3749039"/>
-            <a:ext cx="6095847" cy="822960"/>
+            <a:off x="822960" y="3886200"/>
+            <a:ext cx="5608179" cy="822960"/>
           </a:xfrm>
           <a:prstGeom prst="rect">
             <a:avLst/>
@@ -3383,9 +3480,9 @@
               </a:lnSpc>
             </a:pPr>
             <a:r>
-              <a:rPr sz="1700" b="0" i="1">
+              <a:rPr sz="1700" b="0" i="0">
                 <a:solidFill>
-                  <a:srgbClr val="723F13"/>
+                  <a:srgbClr val="26231F"/>
                 </a:solidFill>
               </a:rPr>
               <a:t>축가는 친구가 불러 줍니다</a:t>
@@ -3395,14 +3492,14 @@
       </p:sp>
       <p:sp>
         <p:nvSpPr>
-          <p:cNvPr id="5" name="안내 문구"/>
+          <p:cNvPr id="7" name="안내 문구"/>
           <p:cNvSpPr txBox="1"/>
           <p:nvPr/>
         </p:nvSpPr>
         <p:spPr>
           <a:xfrm>
-            <a:off x="853418" y="4617720"/>
-            <a:ext cx="6095847" cy="914400"/>
+            <a:off x="822960" y="4754880"/>
+            <a:ext cx="5608179" cy="914400"/>
           </a:xfrm>
           <a:prstGeom prst="rect">
             <a:avLst/>
@@ -3423,7 +3520,7 @@
             <a:r>
               <a:rPr sz="1400" b="0" i="0">
                 <a:solidFill>
-                  <a:srgbClr val="666666"/>
+                  <a:srgbClr val="26231F"/>
                 </a:solidFill>
               </a:rPr>
               <a:t>신랑 이름 ♥ 신부 이름</a:t>
@@ -3438,10 +3535,10 @@
             <a:r>
               <a:rPr sz="1400" b="0" i="0">
                 <a:solidFill>
-                  <a:srgbClr val="666666"/>
+                  <a:srgbClr val="26231F"/>
                 </a:solidFill>
               </a:rPr>
-              <a:t>2027. 00. 00 · 예식장 이름</a:t>
+              <a:t>날짜 입력 · 예식장 이름</a:t>
             </a:r>
           </a:p>
         </p:txBody>
@@ -3460,7 +3557,7 @@
     <p:bg>
       <p:bgPr>
         <a:solidFill>
-          <a:srgbClr val="FCF4ED"/>
+          <a:srgbClr val="FBF3EC"/>
         </a:solidFill>
         <a:effectLst/>
       </p:bgPr>
@@ -3480,14 +3577,14 @@
         </p:nvSpPr>
         <p:spPr>
           <a:xfrm>
-            <a:off x="0" y="0"/>
-            <a:ext cx="411480" cy="6858000"/>
+            <a:off x="640080" y="566928"/>
+            <a:ext cx="10911535" cy="10972"/>
           </a:xfrm>
           <a:prstGeom prst="rect">
             <a:avLst/>
           </a:prstGeom>
           <a:solidFill>
-            <a:srgbClr val="CA7021"/>
+            <a:srgbClr val="26231F"/>
           </a:solidFill>
           <a:ln>
             <a:noFill/>
@@ -3503,20 +3600,58 @@
       </p:sp>
       <p:sp>
         <p:nvSpPr>
-          <p:cNvPr id="4" name="장식"/>
-          <p:cNvSpPr/>
+          <p:cNvPr id="4" name="상단 라벨"/>
+          <p:cNvSpPr txBox="1"/>
           <p:nvPr/>
         </p:nvSpPr>
         <p:spPr>
           <a:xfrm>
-            <a:off x="411480" y="0"/>
-            <a:ext cx="64008" cy="6858000"/>
+            <a:off x="640080" y="237744"/>
+            <a:ext cx="5486400" cy="274320"/>
           </a:xfrm>
           <a:prstGeom prst="rect">
             <a:avLst/>
           </a:prstGeom>
+          <a:noFill/>
+        </p:spPr>
+        <p:txBody>
+          <a:bodyPr wrap="square" lIns="54864" rIns="54864" tIns="27432" bIns="27432" anchor="ctr">
+            <a:noAutofit/>
+          </a:bodyPr>
+          <a:lstStyle/>
+          <a:p>
+            <a:pPr algn="l">
+              <a:lnSpc>
+                <a:spcPct val="115000"/>
+              </a:lnSpc>
+            </a:pPr>
+            <a:r>
+              <a:rPr sz="900" b="1" i="0" spc="250">
+                <a:solidFill>
+                  <a:srgbClr val="26231F"/>
+                </a:solidFill>
+              </a:rPr>
+              <a:t>WEDDING</a:t>
+            </a:r>
+          </a:p>
+        </p:txBody>
+      </p:sp>
+      <p:sp>
+        <p:nvSpPr>
+          <p:cNvPr id="5" name="포인트"/>
+          <p:cNvSpPr/>
+          <p:nvPr/>
+        </p:nvSpPr>
+        <p:spPr>
+          <a:xfrm>
+            <a:off x="11204143" y="246888"/>
+            <a:ext cx="237744" cy="237744"/>
+          </a:xfrm>
+          <a:prstGeom prst="ellipse">
+            <a:avLst/>
+          </a:prstGeom>
           <a:solidFill>
-            <a:srgbClr val="3B918E"/>
+            <a:srgbClr val="D8A579"/>
           </a:solidFill>
           <a:ln>
             <a:noFill/>
@@ -3542,8 +3677,8 @@
         </p:nvSpPr>
         <p:spPr>
           <a:xfrm>
-            <a:off x="914400" y="457200"/>
-            <a:ext cx="9448495" cy="868680"/>
+            <a:off x="640080" y="731520"/>
+            <a:ext cx="10911535" cy="822960"/>
           </a:xfrm>
         </p:spPr>
         <p:txBody>
@@ -3560,7 +3695,7 @@
             <a:r>
               <a:rPr sz="3000" b="1" i="0">
                 <a:solidFill>
-                  <a:srgbClr val="723F13"/>
+                  <a:srgbClr val="26231F"/>
                 </a:solidFill>
               </a:rPr>
               <a:t>신랑 · 신부 소개</a:t>
@@ -3570,25 +3705,23 @@
       </p:sp>
       <p:sp>
         <p:nvSpPr>
-          <p:cNvPr id="5" name="사진 자리"/>
+          <p:cNvPr id="6" name="사진 자리"/>
           <p:cNvSpPr/>
           <p:nvPr/>
         </p:nvSpPr>
         <p:spPr>
           <a:xfrm>
-            <a:off x="2144953" y="1600200"/>
-            <a:ext cx="2400300" cy="2400300"/>
+            <a:off x="1996363" y="1783080"/>
+            <a:ext cx="2286000" cy="2286000"/>
           </a:xfrm>
           <a:prstGeom prst="ellipse">
             <a:avLst/>
           </a:prstGeom>
           <a:solidFill>
-            <a:srgbClr val="F8DFC9"/>
+            <a:srgbClr val="F6E4D5"/>
           </a:solidFill>
           <a:ln w="19050">
-            <a:solidFill>
-              <a:srgbClr val="CA7021"/>
-            </a:solidFill>
+            <a:noFill/>
             <a:prstDash val="dash"/>
           </a:ln>
         </p:spPr>
@@ -3606,7 +3739,7 @@
             <a:r>
               <a:rPr sz="1200" b="0" i="0">
                 <a:solidFill>
-                  <a:srgbClr val="723F13"/>
+                  <a:srgbClr val="8E8780"/>
                 </a:solidFill>
               </a:rPr>
               <a:t>사진</a:t>
@@ -3616,14 +3749,14 @@
       </p:sp>
       <p:sp>
         <p:nvSpPr>
-          <p:cNvPr id="6" name="TextBox 5"/>
+          <p:cNvPr id="7" name="TextBox 6"/>
           <p:cNvSpPr txBox="1"/>
           <p:nvPr/>
         </p:nvSpPr>
         <p:spPr>
           <a:xfrm>
-            <a:off x="914400" y="4091939"/>
-            <a:ext cx="4861407" cy="411480"/>
+            <a:off x="640080" y="4160520"/>
+            <a:ext cx="4998567" cy="411480"/>
           </a:xfrm>
           <a:prstGeom prst="rect">
             <a:avLst/>
@@ -3644,7 +3777,7 @@
             <a:r>
               <a:rPr sz="1600" b="1" i="0">
                 <a:solidFill>
-                  <a:srgbClr val="723F13"/>
+                  <a:srgbClr val="493727"/>
                 </a:solidFill>
               </a:rPr>
               <a:t>신랑</a:t>
@@ -3654,14 +3787,14 @@
       </p:sp>
       <p:sp>
         <p:nvSpPr>
-          <p:cNvPr id="7" name="TextBox 6"/>
+          <p:cNvPr id="8" name="TextBox 7"/>
           <p:cNvSpPr txBox="1"/>
           <p:nvPr/>
         </p:nvSpPr>
         <p:spPr>
           <a:xfrm>
-            <a:off x="1005840" y="4549140"/>
-            <a:ext cx="4678527" cy="1851660"/>
+            <a:off x="731519" y="4617720"/>
+            <a:ext cx="4815687" cy="1737360"/>
           </a:xfrm>
           <a:prstGeom prst="rect">
             <a:avLst/>
@@ -3722,25 +3855,23 @@
       </p:sp>
       <p:sp>
         <p:nvSpPr>
-          <p:cNvPr id="8" name="사진 자리"/>
+          <p:cNvPr id="9" name="사진 자리"/>
           <p:cNvSpPr/>
           <p:nvPr/>
         </p:nvSpPr>
         <p:spPr>
           <a:xfrm>
-            <a:off x="7920761" y="1600200"/>
-            <a:ext cx="2400300" cy="2400300"/>
+            <a:off x="7909331" y="1783080"/>
+            <a:ext cx="2286000" cy="2286000"/>
           </a:xfrm>
           <a:prstGeom prst="ellipse">
             <a:avLst/>
           </a:prstGeom>
           <a:solidFill>
-            <a:srgbClr val="F8DFC9"/>
+            <a:srgbClr val="F6E4D5"/>
           </a:solidFill>
           <a:ln w="19050">
-            <a:solidFill>
-              <a:srgbClr val="CA7021"/>
-            </a:solidFill>
+            <a:noFill/>
             <a:prstDash val="dash"/>
           </a:ln>
         </p:spPr>
@@ -3758,7 +3889,7 @@
             <a:r>
               <a:rPr sz="1200" b="0" i="0">
                 <a:solidFill>
-                  <a:srgbClr val="723F13"/>
+                  <a:srgbClr val="8E8780"/>
                 </a:solidFill>
               </a:rPr>
               <a:t>사진</a:t>
@@ -3768,14 +3899,14 @@
       </p:sp>
       <p:sp>
         <p:nvSpPr>
-          <p:cNvPr id="9" name="TextBox 8"/>
+          <p:cNvPr id="10" name="TextBox 9"/>
           <p:cNvSpPr txBox="1"/>
           <p:nvPr/>
         </p:nvSpPr>
         <p:spPr>
           <a:xfrm>
-            <a:off x="6690207" y="4091939"/>
-            <a:ext cx="4861407" cy="411480"/>
+            <a:off x="6553047" y="4160520"/>
+            <a:ext cx="4998567" cy="411480"/>
           </a:xfrm>
           <a:prstGeom prst="rect">
             <a:avLst/>
@@ -3796,7 +3927,7 @@
             <a:r>
               <a:rPr sz="1600" b="1" i="0">
                 <a:solidFill>
-                  <a:srgbClr val="723F13"/>
+                  <a:srgbClr val="493727"/>
                 </a:solidFill>
               </a:rPr>
               <a:t>신부</a:t>
@@ -3806,14 +3937,14 @@
       </p:sp>
       <p:sp>
         <p:nvSpPr>
-          <p:cNvPr id="10" name="TextBox 9"/>
+          <p:cNvPr id="11" name="TextBox 10"/>
           <p:cNvSpPr txBox="1"/>
           <p:nvPr/>
         </p:nvSpPr>
         <p:spPr>
           <a:xfrm>
-            <a:off x="6781647" y="4549140"/>
-            <a:ext cx="4678527" cy="1851660"/>
+            <a:off x="6644487" y="4617720"/>
+            <a:ext cx="4815687" cy="1737360"/>
           </a:xfrm>
           <a:prstGeom prst="rect">
             <a:avLst/>
@@ -3886,7 +4017,7 @@
     <p:bg>
       <p:bgPr>
         <a:solidFill>
-          <a:srgbClr val="FCF4ED"/>
+          <a:srgbClr val="FBF3EC"/>
         </a:solidFill>
         <a:effectLst/>
       </p:bgPr>
@@ -3906,14 +4037,14 @@
         </p:nvSpPr>
         <p:spPr>
           <a:xfrm>
-            <a:off x="0" y="0"/>
-            <a:ext cx="411480" cy="6858000"/>
+            <a:off x="640080" y="566928"/>
+            <a:ext cx="10911535" cy="10972"/>
           </a:xfrm>
           <a:prstGeom prst="rect">
             <a:avLst/>
           </a:prstGeom>
           <a:solidFill>
-            <a:srgbClr val="CA7021"/>
+            <a:srgbClr val="26231F"/>
           </a:solidFill>
           <a:ln>
             <a:noFill/>
@@ -3929,20 +4060,58 @@
       </p:sp>
       <p:sp>
         <p:nvSpPr>
-          <p:cNvPr id="4" name="장식"/>
-          <p:cNvSpPr/>
+          <p:cNvPr id="4" name="상단 라벨"/>
+          <p:cNvSpPr txBox="1"/>
           <p:nvPr/>
         </p:nvSpPr>
         <p:spPr>
           <a:xfrm>
-            <a:off x="411480" y="0"/>
-            <a:ext cx="64008" cy="6858000"/>
+            <a:off x="640080" y="237744"/>
+            <a:ext cx="5486400" cy="274320"/>
           </a:xfrm>
           <a:prstGeom prst="rect">
             <a:avLst/>
           </a:prstGeom>
+          <a:noFill/>
+        </p:spPr>
+        <p:txBody>
+          <a:bodyPr wrap="square" lIns="54864" rIns="54864" tIns="27432" bIns="27432" anchor="ctr">
+            <a:noAutofit/>
+          </a:bodyPr>
+          <a:lstStyle/>
+          <a:p>
+            <a:pPr algn="l">
+              <a:lnSpc>
+                <a:spcPct val="115000"/>
+              </a:lnSpc>
+            </a:pPr>
+            <a:r>
+              <a:rPr sz="900" b="1" i="0" spc="250">
+                <a:solidFill>
+                  <a:srgbClr val="26231F"/>
+                </a:solidFill>
+              </a:rPr>
+              <a:t>WEDDING</a:t>
+            </a:r>
+          </a:p>
+        </p:txBody>
+      </p:sp>
+      <p:sp>
+        <p:nvSpPr>
+          <p:cNvPr id="5" name="포인트"/>
+          <p:cNvSpPr/>
+          <p:nvPr/>
+        </p:nvSpPr>
+        <p:spPr>
+          <a:xfrm>
+            <a:off x="11204143" y="246888"/>
+            <a:ext cx="237744" cy="237744"/>
+          </a:xfrm>
+          <a:prstGeom prst="ellipse">
+            <a:avLst/>
+          </a:prstGeom>
           <a:solidFill>
-            <a:srgbClr val="3B918E"/>
+            <a:srgbClr val="D8A579"/>
           </a:solidFill>
           <a:ln>
             <a:noFill/>
@@ -3968,8 +4137,8 @@
         </p:nvSpPr>
         <p:spPr>
           <a:xfrm>
-            <a:off x="914400" y="457200"/>
-            <a:ext cx="9448495" cy="868680"/>
+            <a:off x="640080" y="731520"/>
+            <a:ext cx="10911535" cy="822960"/>
           </a:xfrm>
         </p:spPr>
         <p:txBody>
@@ -3986,7 +4155,7 @@
             <a:r>
               <a:rPr sz="3000" b="1" i="0">
                 <a:solidFill>
-                  <a:srgbClr val="723F13"/>
+                  <a:srgbClr val="26231F"/>
                 </a:solidFill>
               </a:rPr>
               <a:t>식순 안내</a:t>
@@ -3996,15 +4165,15 @@
       </p:sp>
       <p:graphicFrame>
         <p:nvGraphicFramePr>
-          <p:cNvPr id="5" name="표"/>
+          <p:cNvPr id="6" name="표"/>
           <p:cNvGraphicFramePr>
             <a:graphicFrameLocks noGrp="1"/>
           </p:cNvGraphicFramePr>
           <p:nvPr/>
         </p:nvGraphicFramePr>
         <p:xfrm>
-          <a:off x="914400" y="1600200"/>
-          <a:ext cx="10637215" cy="3950208"/>
+          <a:off x="640080" y="1783080"/>
+          <a:ext cx="10911535" cy="3950208"/>
         </p:xfrm>
         <a:graphic>
           <a:graphicData uri="http://schemas.openxmlformats.org/drawingml/2006/table">
@@ -4014,8 +4183,8 @@
               </a:tblPr>
               <a:tblGrid>
                 <a:gridCol w="2011680"/>
-                <a:gridCol w="5175321"/>
-                <a:gridCol w="3450214"/>
+                <a:gridCol w="5339913"/>
+                <a:gridCol w="3559942"/>
               </a:tblGrid>
               <a:tr h="658368">
                 <a:tc>
@@ -4027,7 +4196,7 @@
                       <a:r>
                         <a:rPr sz="1500" b="1">
                           <a:solidFill>
-                            <a:srgbClr val="FFFFFF"/>
+                            <a:srgbClr val="26231F"/>
                           </a:solidFill>
                         </a:rPr>
                         <a:t>시간</a:t>
@@ -4037,30 +4206,30 @@
                   <a:tcPr anchor="ctr" marL="73152" marR="73152">
                     <a:lnL w="9525" cap="flat" cmpd="sng" algn="ctr">
                       <a:solidFill>
-                        <a:srgbClr val="CA7021"/>
+                        <a:srgbClr val="D8A579"/>
                       </a:solidFill>
                       <a:prstDash val="solid"/>
                     </a:lnL>
                     <a:lnR w="9525" cap="flat" cmpd="sng" algn="ctr">
                       <a:solidFill>
-                        <a:srgbClr val="CA7021"/>
+                        <a:srgbClr val="D8A579"/>
                       </a:solidFill>
                       <a:prstDash val="solid"/>
                     </a:lnR>
                     <a:lnT w="9525" cap="flat" cmpd="sng" algn="ctr">
                       <a:solidFill>
-                        <a:srgbClr val="CA7021"/>
+                        <a:srgbClr val="D8A579"/>
                       </a:solidFill>
                       <a:prstDash val="solid"/>
                     </a:lnT>
                     <a:lnB w="9525" cap="flat" cmpd="sng" algn="ctr">
                       <a:solidFill>
-                        <a:srgbClr val="CA7021"/>
+                        <a:srgbClr val="D8A579"/>
                       </a:solidFill>
                       <a:prstDash val="solid"/>
                     </a:lnB>
                     <a:solidFill>
-                      <a:srgbClr val="CA7021"/>
+                      <a:srgbClr val="D8A579"/>
                     </a:solidFill>
                   </a:tcPr>
                 </a:tc>
@@ -4073,7 +4242,7 @@
                       <a:r>
                         <a:rPr sz="1500" b="1">
                           <a:solidFill>
-                            <a:srgbClr val="FFFFFF"/>
+                            <a:srgbClr val="26231F"/>
                           </a:solidFill>
                         </a:rPr>
                         <a:t>순서</a:t>
@@ -4083,30 +4252,30 @@
                   <a:tcPr anchor="ctr" marL="73152" marR="73152">
                     <a:lnL w="9525" cap="flat" cmpd="sng" algn="ctr">
                       <a:solidFill>
-                        <a:srgbClr val="CA7021"/>
+                        <a:srgbClr val="D8A579"/>
                       </a:solidFill>
                       <a:prstDash val="solid"/>
                     </a:lnL>
                     <a:lnR w="9525" cap="flat" cmpd="sng" algn="ctr">
                       <a:solidFill>
-                        <a:srgbClr val="CA7021"/>
+                        <a:srgbClr val="D8A579"/>
                       </a:solidFill>
                       <a:prstDash val="solid"/>
                     </a:lnR>
                     <a:lnT w="9525" cap="flat" cmpd="sng" algn="ctr">
                       <a:solidFill>
-                        <a:srgbClr val="CA7021"/>
+                        <a:srgbClr val="D8A579"/>
                       </a:solidFill>
                       <a:prstDash val="solid"/>
                     </a:lnT>
                     <a:lnB w="9525" cap="flat" cmpd="sng" algn="ctr">
                       <a:solidFill>
-                        <a:srgbClr val="CA7021"/>
+                        <a:srgbClr val="D8A579"/>
                       </a:solidFill>
                       <a:prstDash val="solid"/>
                     </a:lnB>
                     <a:solidFill>
-                      <a:srgbClr val="CA7021"/>
+                      <a:srgbClr val="D8A579"/>
                     </a:solidFill>
                   </a:tcPr>
                 </a:tc>
@@ -4119,7 +4288,7 @@
                       <a:r>
                         <a:rPr sz="1500" b="1">
                           <a:solidFill>
-                            <a:srgbClr val="FFFFFF"/>
+                            <a:srgbClr val="26231F"/>
                           </a:solidFill>
                         </a:rPr>
                         <a:t>담당</a:t>
@@ -4129,30 +4298,30 @@
                   <a:tcPr anchor="ctr" marL="73152" marR="73152">
                     <a:lnL w="9525" cap="flat" cmpd="sng" algn="ctr">
                       <a:solidFill>
-                        <a:srgbClr val="CA7021"/>
+                        <a:srgbClr val="D8A579"/>
                       </a:solidFill>
                       <a:prstDash val="solid"/>
                     </a:lnL>
                     <a:lnR w="9525" cap="flat" cmpd="sng" algn="ctr">
                       <a:solidFill>
-                        <a:srgbClr val="CA7021"/>
+                        <a:srgbClr val="D8A579"/>
                       </a:solidFill>
                       <a:prstDash val="solid"/>
                     </a:lnR>
                     <a:lnT w="9525" cap="flat" cmpd="sng" algn="ctr">
                       <a:solidFill>
-                        <a:srgbClr val="CA7021"/>
+                        <a:srgbClr val="D8A579"/>
                       </a:solidFill>
                       <a:prstDash val="solid"/>
                     </a:lnT>
                     <a:lnB w="9525" cap="flat" cmpd="sng" algn="ctr">
                       <a:solidFill>
-                        <a:srgbClr val="CA7021"/>
+                        <a:srgbClr val="D8A579"/>
                       </a:solidFill>
                       <a:prstDash val="solid"/>
                     </a:lnB>
                     <a:solidFill>
-                      <a:srgbClr val="CA7021"/>
+                      <a:srgbClr val="D8A579"/>
                     </a:solidFill>
                   </a:tcPr>
                 </a:tc>
@@ -4167,7 +4336,7 @@
                       <a:r>
                         <a:rPr sz="1500" b="1">
                           <a:solidFill>
-                            <a:srgbClr val="723F13"/>
+                            <a:srgbClr val="493727"/>
                           </a:solidFill>
                         </a:rPr>
                         <a:t>00:00</a:t>
@@ -4177,30 +4346,30 @@
                   <a:tcPr anchor="ctr" marL="73152" marR="73152">
                     <a:lnL w="9525" cap="flat" cmpd="sng" algn="ctr">
                       <a:solidFill>
-                        <a:srgbClr val="F8DFC9"/>
+                        <a:srgbClr val="F6E4D5"/>
                       </a:solidFill>
                       <a:prstDash val="solid"/>
                     </a:lnL>
                     <a:lnR w="9525" cap="flat" cmpd="sng" algn="ctr">
                       <a:solidFill>
-                        <a:srgbClr val="F8DFC9"/>
+                        <a:srgbClr val="F6E4D5"/>
                       </a:solidFill>
                       <a:prstDash val="solid"/>
                     </a:lnR>
                     <a:lnT w="9525" cap="flat" cmpd="sng" algn="ctr">
                       <a:solidFill>
-                        <a:srgbClr val="F8DFC9"/>
+                        <a:srgbClr val="F6E4D5"/>
                       </a:solidFill>
                       <a:prstDash val="solid"/>
                     </a:lnT>
                     <a:lnB w="9525" cap="flat" cmpd="sng" algn="ctr">
                       <a:solidFill>
-                        <a:srgbClr val="F8DFC9"/>
+                        <a:srgbClr val="F6E4D5"/>
                       </a:solidFill>
                       <a:prstDash val="solid"/>
                     </a:lnB>
                     <a:solidFill>
-                      <a:srgbClr val="F8DFC9"/>
+                      <a:srgbClr val="F6E4D5"/>
                     </a:solidFill>
                   </a:tcPr>
                 </a:tc>
@@ -4213,7 +4382,7 @@
                       <a:r>
                         <a:rPr sz="1500" b="0">
                           <a:solidFill>
-                            <a:srgbClr val="2B2B2B"/>
+                            <a:srgbClr val="26231F"/>
                           </a:solidFill>
                         </a:rPr>
                         <a:t>하객 맞이</a:t>
@@ -4223,25 +4392,25 @@
                   <a:tcPr anchor="ctr" marL="73152" marR="73152">
                     <a:lnL w="9525" cap="flat" cmpd="sng" algn="ctr">
                       <a:solidFill>
-                        <a:srgbClr val="F8DFC9"/>
+                        <a:srgbClr val="F6E4D5"/>
                       </a:solidFill>
                       <a:prstDash val="solid"/>
                     </a:lnL>
                     <a:lnR w="9525" cap="flat" cmpd="sng" algn="ctr">
                       <a:solidFill>
-                        <a:srgbClr val="F8DFC9"/>
+                        <a:srgbClr val="F6E4D5"/>
                       </a:solidFill>
                       <a:prstDash val="solid"/>
                     </a:lnR>
                     <a:lnT w="9525" cap="flat" cmpd="sng" algn="ctr">
                       <a:solidFill>
-                        <a:srgbClr val="F8DFC9"/>
+                        <a:srgbClr val="F6E4D5"/>
                       </a:solidFill>
                       <a:prstDash val="solid"/>
                     </a:lnT>
                     <a:lnB w="9525" cap="flat" cmpd="sng" algn="ctr">
                       <a:solidFill>
-                        <a:srgbClr val="F8DFC9"/>
+                        <a:srgbClr val="F6E4D5"/>
                       </a:solidFill>
                       <a:prstDash val="solid"/>
                     </a:lnB>
@@ -4259,7 +4428,7 @@
                       <a:r>
                         <a:rPr sz="1500" b="0">
                           <a:solidFill>
-                            <a:srgbClr val="2B2B2B"/>
+                            <a:srgbClr val="26231F"/>
                           </a:solidFill>
                         </a:rPr>
                         <a:t/>
@@ -4269,25 +4438,25 @@
                   <a:tcPr anchor="ctr" marL="73152" marR="73152">
                     <a:lnL w="9525" cap="flat" cmpd="sng" algn="ctr">
                       <a:solidFill>
-                        <a:srgbClr val="F8DFC9"/>
+                        <a:srgbClr val="F6E4D5"/>
                       </a:solidFill>
                       <a:prstDash val="solid"/>
                     </a:lnL>
                     <a:lnR w="9525" cap="flat" cmpd="sng" algn="ctr">
                       <a:solidFill>
-                        <a:srgbClr val="F8DFC9"/>
+                        <a:srgbClr val="F6E4D5"/>
                       </a:solidFill>
                       <a:prstDash val="solid"/>
                     </a:lnR>
                     <a:lnT w="9525" cap="flat" cmpd="sng" algn="ctr">
                       <a:solidFill>
-                        <a:srgbClr val="F8DFC9"/>
+                        <a:srgbClr val="F6E4D5"/>
                       </a:solidFill>
                       <a:prstDash val="solid"/>
                     </a:lnT>
                     <a:lnB w="9525" cap="flat" cmpd="sng" algn="ctr">
                       <a:solidFill>
-                        <a:srgbClr val="F8DFC9"/>
+                        <a:srgbClr val="F6E4D5"/>
                       </a:solidFill>
                       <a:prstDash val="solid"/>
                     </a:lnB>
@@ -4307,7 +4476,7 @@
                       <a:r>
                         <a:rPr sz="1500" b="1">
                           <a:solidFill>
-                            <a:srgbClr val="723F13"/>
+                            <a:srgbClr val="493727"/>
                           </a:solidFill>
                         </a:rPr>
                         <a:t>00:00</a:t>
@@ -4317,30 +4486,30 @@
                   <a:tcPr anchor="ctr" marL="73152" marR="73152">
                     <a:lnL w="9525" cap="flat" cmpd="sng" algn="ctr">
                       <a:solidFill>
-                        <a:srgbClr val="F8DFC9"/>
+                        <a:srgbClr val="F6E4D5"/>
                       </a:solidFill>
                       <a:prstDash val="solid"/>
                     </a:lnL>
                     <a:lnR w="9525" cap="flat" cmpd="sng" algn="ctr">
                       <a:solidFill>
-                        <a:srgbClr val="F8DFC9"/>
+                        <a:srgbClr val="F6E4D5"/>
                       </a:solidFill>
                       <a:prstDash val="solid"/>
                     </a:lnR>
                     <a:lnT w="9525" cap="flat" cmpd="sng" algn="ctr">
                       <a:solidFill>
-                        <a:srgbClr val="F8DFC9"/>
+                        <a:srgbClr val="F6E4D5"/>
                       </a:solidFill>
                       <a:prstDash val="solid"/>
                     </a:lnT>
                     <a:lnB w="9525" cap="flat" cmpd="sng" algn="ctr">
                       <a:solidFill>
-                        <a:srgbClr val="F8DFC9"/>
+                        <a:srgbClr val="F6E4D5"/>
                       </a:solidFill>
                       <a:prstDash val="solid"/>
                     </a:lnB>
                     <a:solidFill>
-                      <a:srgbClr val="F8DFC9"/>
+                      <a:srgbClr val="F6E4D5"/>
                     </a:solidFill>
                   </a:tcPr>
                 </a:tc>
@@ -4353,7 +4522,7 @@
                       <a:r>
                         <a:rPr sz="1500" b="0">
                           <a:solidFill>
-                            <a:srgbClr val="2B2B2B"/>
+                            <a:srgbClr val="26231F"/>
                           </a:solidFill>
                         </a:rPr>
                         <a:t>신랑 · 신부 입장</a:t>
@@ -4363,30 +4532,30 @@
                   <a:tcPr anchor="ctr" marL="73152" marR="73152">
                     <a:lnL w="9525" cap="flat" cmpd="sng" algn="ctr">
                       <a:solidFill>
-                        <a:srgbClr val="F8DFC9"/>
+                        <a:srgbClr val="F6E4D5"/>
                       </a:solidFill>
                       <a:prstDash val="solid"/>
                     </a:lnL>
                     <a:lnR w="9525" cap="flat" cmpd="sng" algn="ctr">
                       <a:solidFill>
-                        <a:srgbClr val="F8DFC9"/>
+                        <a:srgbClr val="F6E4D5"/>
                       </a:solidFill>
                       <a:prstDash val="solid"/>
                     </a:lnR>
                     <a:lnT w="9525" cap="flat" cmpd="sng" algn="ctr">
                       <a:solidFill>
-                        <a:srgbClr val="F8DFC9"/>
+                        <a:srgbClr val="F6E4D5"/>
                       </a:solidFill>
                       <a:prstDash val="solid"/>
                     </a:lnT>
                     <a:lnB w="9525" cap="flat" cmpd="sng" algn="ctr">
                       <a:solidFill>
-                        <a:srgbClr val="F8DFC9"/>
+                        <a:srgbClr val="F6E4D5"/>
                       </a:solidFill>
                       <a:prstDash val="solid"/>
                     </a:lnB>
                     <a:solidFill>
-                      <a:srgbClr val="FCF4ED"/>
+                      <a:srgbClr val="FBF3EC"/>
                     </a:solidFill>
                   </a:tcPr>
                 </a:tc>
@@ -4399,7 +4568,7 @@
                       <a:r>
                         <a:rPr sz="1500" b="0">
                           <a:solidFill>
-                            <a:srgbClr val="2B2B2B"/>
+                            <a:srgbClr val="26231F"/>
                           </a:solidFill>
                         </a:rPr>
                         <a:t/>
@@ -4409,30 +4578,30 @@
                   <a:tcPr anchor="ctr" marL="73152" marR="73152">
                     <a:lnL w="9525" cap="flat" cmpd="sng" algn="ctr">
                       <a:solidFill>
-                        <a:srgbClr val="F8DFC9"/>
+                        <a:srgbClr val="F6E4D5"/>
                       </a:solidFill>
                       <a:prstDash val="solid"/>
                     </a:lnL>
                     <a:lnR w="9525" cap="flat" cmpd="sng" algn="ctr">
                       <a:solidFill>
-                        <a:srgbClr val="F8DFC9"/>
+                        <a:srgbClr val="F6E4D5"/>
                       </a:solidFill>
                       <a:prstDash val="solid"/>
                     </a:lnR>
                     <a:lnT w="9525" cap="flat" cmpd="sng" algn="ctr">
                       <a:solidFill>
-                        <a:srgbClr val="F8DFC9"/>
+                        <a:srgbClr val="F6E4D5"/>
                       </a:solidFill>
                       <a:prstDash val="solid"/>
                     </a:lnT>
                     <a:lnB w="9525" cap="flat" cmpd="sng" algn="ctr">
                       <a:solidFill>
-                        <a:srgbClr val="F8DFC9"/>
+                        <a:srgbClr val="F6E4D5"/>
                       </a:solidFill>
                       <a:prstDash val="solid"/>
                     </a:lnB>
                     <a:solidFill>
-                      <a:srgbClr val="FCF4ED"/>
+                      <a:srgbClr val="FBF3EC"/>
                     </a:solidFill>
                   </a:tcPr>
                 </a:tc>
@@ -4447,7 +4616,7 @@
                       <a:r>
                         <a:rPr sz="1500" b="1">
                           <a:solidFill>
-                            <a:srgbClr val="723F13"/>
+                            <a:srgbClr val="493727"/>
                           </a:solidFill>
                         </a:rPr>
                         <a:t>00:00</a:t>
@@ -4457,30 +4626,30 @@
                   <a:tcPr anchor="ctr" marL="73152" marR="73152">
                     <a:lnL w="9525" cap="flat" cmpd="sng" algn="ctr">
                       <a:solidFill>
-                        <a:srgbClr val="F8DFC9"/>
+                        <a:srgbClr val="F6E4D5"/>
                       </a:solidFill>
                       <a:prstDash val="solid"/>
                     </a:lnL>
                     <a:lnR w="9525" cap="flat" cmpd="sng" algn="ctr">
                       <a:solidFill>
-                        <a:srgbClr val="F8DFC9"/>
+                        <a:srgbClr val="F6E4D5"/>
                       </a:solidFill>
                       <a:prstDash val="solid"/>
                     </a:lnR>
                     <a:lnT w="9525" cap="flat" cmpd="sng" algn="ctr">
                       <a:solidFill>
-                        <a:srgbClr val="F8DFC9"/>
+                        <a:srgbClr val="F6E4D5"/>
                       </a:solidFill>
                       <a:prstDash val="solid"/>
                     </a:lnT>
                     <a:lnB w="9525" cap="flat" cmpd="sng" algn="ctr">
                       <a:solidFill>
-                        <a:srgbClr val="F8DFC9"/>
+                        <a:srgbClr val="F6E4D5"/>
                       </a:solidFill>
                       <a:prstDash val="solid"/>
                     </a:lnB>
                     <a:solidFill>
-                      <a:srgbClr val="F8DFC9"/>
+                      <a:srgbClr val="F6E4D5"/>
                     </a:solidFill>
                   </a:tcPr>
                 </a:tc>
@@ -4493,7 +4662,7 @@
                       <a:r>
                         <a:rPr sz="1500" b="0">
                           <a:solidFill>
-                            <a:srgbClr val="2B2B2B"/>
+                            <a:srgbClr val="26231F"/>
                           </a:solidFill>
                         </a:rPr>
                         <a:t>혼인 서약</a:t>
@@ -4503,25 +4672,25 @@
                   <a:tcPr anchor="ctr" marL="73152" marR="73152">
                     <a:lnL w="9525" cap="flat" cmpd="sng" algn="ctr">
                       <a:solidFill>
-                        <a:srgbClr val="F8DFC9"/>
+                        <a:srgbClr val="F6E4D5"/>
                       </a:solidFill>
                       <a:prstDash val="solid"/>
                     </a:lnL>
                     <a:lnR w="9525" cap="flat" cmpd="sng" algn="ctr">
                       <a:solidFill>
-                        <a:srgbClr val="F8DFC9"/>
+                        <a:srgbClr val="F6E4D5"/>
                       </a:solidFill>
                       <a:prstDash val="solid"/>
                     </a:lnR>
                     <a:lnT w="9525" cap="flat" cmpd="sng" algn="ctr">
                       <a:solidFill>
-                        <a:srgbClr val="F8DFC9"/>
+                        <a:srgbClr val="F6E4D5"/>
                       </a:solidFill>
                       <a:prstDash val="solid"/>
                     </a:lnT>
                     <a:lnB w="9525" cap="flat" cmpd="sng" algn="ctr">
                       <a:solidFill>
-                        <a:srgbClr val="F8DFC9"/>
+                        <a:srgbClr val="F6E4D5"/>
                       </a:solidFill>
                       <a:prstDash val="solid"/>
                     </a:lnB>
@@ -4539,7 +4708,7 @@
                       <a:r>
                         <a:rPr sz="1500" b="0">
                           <a:solidFill>
-                            <a:srgbClr val="2B2B2B"/>
+                            <a:srgbClr val="26231F"/>
                           </a:solidFill>
                         </a:rPr>
                         <a:t/>
@@ -4549,25 +4718,25 @@
                   <a:tcPr anchor="ctr" marL="73152" marR="73152">
                     <a:lnL w="9525" cap="flat" cmpd="sng" algn="ctr">
                       <a:solidFill>
-                        <a:srgbClr val="F8DFC9"/>
+                        <a:srgbClr val="F6E4D5"/>
                       </a:solidFill>
                       <a:prstDash val="solid"/>
                     </a:lnL>
                     <a:lnR w="9525" cap="flat" cmpd="sng" algn="ctr">
                       <a:solidFill>
-                        <a:srgbClr val="F8DFC9"/>
+                        <a:srgbClr val="F6E4D5"/>
                       </a:solidFill>
                       <a:prstDash val="solid"/>
                     </a:lnR>
                     <a:lnT w="9525" cap="flat" cmpd="sng" algn="ctr">
                       <a:solidFill>
-                        <a:srgbClr val="F8DFC9"/>
+                        <a:srgbClr val="F6E4D5"/>
                       </a:solidFill>
                       <a:prstDash val="solid"/>
                     </a:lnT>
                     <a:lnB w="9525" cap="flat" cmpd="sng" algn="ctr">
                       <a:solidFill>
-                        <a:srgbClr val="F8DFC9"/>
+                        <a:srgbClr val="F6E4D5"/>
                       </a:solidFill>
                       <a:prstDash val="solid"/>
                     </a:lnB>
@@ -4587,7 +4756,7 @@
                       <a:r>
                         <a:rPr sz="1500" b="1">
                           <a:solidFill>
-                            <a:srgbClr val="723F13"/>
+                            <a:srgbClr val="493727"/>
                           </a:solidFill>
                         </a:rPr>
                         <a:t>00:00</a:t>
@@ -4597,30 +4766,30 @@
                   <a:tcPr anchor="ctr" marL="73152" marR="73152">
                     <a:lnL w="9525" cap="flat" cmpd="sng" algn="ctr">
                       <a:solidFill>
-                        <a:srgbClr val="F8DFC9"/>
+                        <a:srgbClr val="F6E4D5"/>
                       </a:solidFill>
                       <a:prstDash val="solid"/>
                     </a:lnL>
                     <a:lnR w="9525" cap="flat" cmpd="sng" algn="ctr">
                       <a:solidFill>
-                        <a:srgbClr val="F8DFC9"/>
+                        <a:srgbClr val="F6E4D5"/>
                       </a:solidFill>
                       <a:prstDash val="solid"/>
                     </a:lnR>
                     <a:lnT w="9525" cap="flat" cmpd="sng" algn="ctr">
                       <a:solidFill>
-                        <a:srgbClr val="F8DFC9"/>
+                        <a:srgbClr val="F6E4D5"/>
                       </a:solidFill>
                       <a:prstDash val="solid"/>
                     </a:lnT>
                     <a:lnB w="9525" cap="flat" cmpd="sng" algn="ctr">
                       <a:solidFill>
-                        <a:srgbClr val="F8DFC9"/>
+                        <a:srgbClr val="F6E4D5"/>
                       </a:solidFill>
                       <a:prstDash val="solid"/>
                     </a:lnB>
                     <a:solidFill>
-                      <a:srgbClr val="F8DFC9"/>
+                      <a:srgbClr val="F6E4D5"/>
                     </a:solidFill>
                   </a:tcPr>
                 </a:tc>
@@ -4633,7 +4802,7 @@
                       <a:r>
                         <a:rPr sz="1500" b="0">
                           <a:solidFill>
-                            <a:srgbClr val="2B2B2B"/>
+                            <a:srgbClr val="26231F"/>
                           </a:solidFill>
                         </a:rPr>
                         <a:t>축가 · 감사 인사</a:t>
@@ -4643,30 +4812,30 @@
                   <a:tcPr anchor="ctr" marL="73152" marR="73152">
                     <a:lnL w="9525" cap="flat" cmpd="sng" algn="ctr">
                       <a:solidFill>
-                        <a:srgbClr val="F8DFC9"/>
+                        <a:srgbClr val="F6E4D5"/>
                       </a:solidFill>
                       <a:prstDash val="solid"/>
                     </a:lnL>
                     <a:lnR w="9525" cap="flat" cmpd="sng" algn="ctr">
                       <a:solidFill>
-                        <a:srgbClr val="F8DFC9"/>
+                        <a:srgbClr val="F6E4D5"/>
                       </a:solidFill>
                       <a:prstDash val="solid"/>
                     </a:lnR>
                     <a:lnT w="9525" cap="flat" cmpd="sng" algn="ctr">
                       <a:solidFill>
-                        <a:srgbClr val="F8DFC9"/>
+                        <a:srgbClr val="F6E4D5"/>
                       </a:solidFill>
                       <a:prstDash val="solid"/>
                     </a:lnT>
                     <a:lnB w="9525" cap="flat" cmpd="sng" algn="ctr">
                       <a:solidFill>
-                        <a:srgbClr val="F8DFC9"/>
+                        <a:srgbClr val="F6E4D5"/>
                       </a:solidFill>
                       <a:prstDash val="solid"/>
                     </a:lnB>
                     <a:solidFill>
-                      <a:srgbClr val="FCF4ED"/>
+                      <a:srgbClr val="FBF3EC"/>
                     </a:solidFill>
                   </a:tcPr>
                 </a:tc>
@@ -4679,7 +4848,7 @@
                       <a:r>
                         <a:rPr sz="1500" b="0">
                           <a:solidFill>
-                            <a:srgbClr val="2B2B2B"/>
+                            <a:srgbClr val="26231F"/>
                           </a:solidFill>
                         </a:rPr>
                         <a:t/>
@@ -4689,30 +4858,30 @@
                   <a:tcPr anchor="ctr" marL="73152" marR="73152">
                     <a:lnL w="9525" cap="flat" cmpd="sng" algn="ctr">
                       <a:solidFill>
-                        <a:srgbClr val="F8DFC9"/>
+                        <a:srgbClr val="F6E4D5"/>
                       </a:solidFill>
                       <a:prstDash val="solid"/>
                     </a:lnL>
                     <a:lnR w="9525" cap="flat" cmpd="sng" algn="ctr">
                       <a:solidFill>
-                        <a:srgbClr val="F8DFC9"/>
+                        <a:srgbClr val="F6E4D5"/>
                       </a:solidFill>
                       <a:prstDash val="solid"/>
                     </a:lnR>
                     <a:lnT w="9525" cap="flat" cmpd="sng" algn="ctr">
                       <a:solidFill>
-                        <a:srgbClr val="F8DFC9"/>
+                        <a:srgbClr val="F6E4D5"/>
                       </a:solidFill>
                       <a:prstDash val="solid"/>
                     </a:lnT>
                     <a:lnB w="9525" cap="flat" cmpd="sng" algn="ctr">
                       <a:solidFill>
-                        <a:srgbClr val="F8DFC9"/>
+                        <a:srgbClr val="F6E4D5"/>
                       </a:solidFill>
                       <a:prstDash val="solid"/>
                     </a:lnB>
                     <a:solidFill>
-                      <a:srgbClr val="FCF4ED"/>
+                      <a:srgbClr val="FBF3EC"/>
                     </a:solidFill>
                   </a:tcPr>
                 </a:tc>
@@ -4727,7 +4896,7 @@
                       <a:r>
                         <a:rPr sz="1500" b="1">
                           <a:solidFill>
-                            <a:srgbClr val="723F13"/>
+                            <a:srgbClr val="493727"/>
                           </a:solidFill>
                         </a:rPr>
                         <a:t>00:00</a:t>
@@ -4737,30 +4906,30 @@
                   <a:tcPr anchor="ctr" marL="73152" marR="73152">
                     <a:lnL w="9525" cap="flat" cmpd="sng" algn="ctr">
                       <a:solidFill>
-                        <a:srgbClr val="F8DFC9"/>
+                        <a:srgbClr val="F6E4D5"/>
                       </a:solidFill>
                       <a:prstDash val="solid"/>
                     </a:lnL>
                     <a:lnR w="9525" cap="flat" cmpd="sng" algn="ctr">
                       <a:solidFill>
-                        <a:srgbClr val="F8DFC9"/>
+                        <a:srgbClr val="F6E4D5"/>
                       </a:solidFill>
                       <a:prstDash val="solid"/>
                     </a:lnR>
                     <a:lnT w="9525" cap="flat" cmpd="sng" algn="ctr">
                       <a:solidFill>
-                        <a:srgbClr val="F8DFC9"/>
+                        <a:srgbClr val="F6E4D5"/>
                       </a:solidFill>
                       <a:prstDash val="solid"/>
                     </a:lnT>
                     <a:lnB w="9525" cap="flat" cmpd="sng" algn="ctr">
                       <a:solidFill>
-                        <a:srgbClr val="F8DFC9"/>
+                        <a:srgbClr val="F6E4D5"/>
                       </a:solidFill>
                       <a:prstDash val="solid"/>
                     </a:lnB>
                     <a:solidFill>
-                      <a:srgbClr val="F8DFC9"/>
+                      <a:srgbClr val="F6E4D5"/>
                     </a:solidFill>
                   </a:tcPr>
                 </a:tc>
@@ -4773,7 +4942,7 @@
                       <a:r>
                         <a:rPr sz="1500" b="0">
                           <a:solidFill>
-                            <a:srgbClr val="2B2B2B"/>
+                            <a:srgbClr val="26231F"/>
                           </a:solidFill>
                         </a:rPr>
                         <a:t>기념 촬영 · 식사</a:t>
@@ -4783,25 +4952,25 @@
                   <a:tcPr anchor="ctr" marL="73152" marR="73152">
                     <a:lnL w="9525" cap="flat" cmpd="sng" algn="ctr">
                       <a:solidFill>
-                        <a:srgbClr val="F8DFC9"/>
+                        <a:srgbClr val="F6E4D5"/>
                       </a:solidFill>
                       <a:prstDash val="solid"/>
                     </a:lnL>
                     <a:lnR w="9525" cap="flat" cmpd="sng" algn="ctr">
                       <a:solidFill>
-                        <a:srgbClr val="F8DFC9"/>
+                        <a:srgbClr val="F6E4D5"/>
                       </a:solidFill>
                       <a:prstDash val="solid"/>
                     </a:lnR>
                     <a:lnT w="9525" cap="flat" cmpd="sng" algn="ctr">
                       <a:solidFill>
-                        <a:srgbClr val="F8DFC9"/>
+                        <a:srgbClr val="F6E4D5"/>
                       </a:solidFill>
                       <a:prstDash val="solid"/>
                     </a:lnT>
                     <a:lnB w="9525" cap="flat" cmpd="sng" algn="ctr">
                       <a:solidFill>
-                        <a:srgbClr val="F8DFC9"/>
+                        <a:srgbClr val="F6E4D5"/>
                       </a:solidFill>
                       <a:prstDash val="solid"/>
                     </a:lnB>
@@ -4819,7 +4988,7 @@
                       <a:r>
                         <a:rPr sz="1500" b="0">
                           <a:solidFill>
-                            <a:srgbClr val="2B2B2B"/>
+                            <a:srgbClr val="26231F"/>
                           </a:solidFill>
                         </a:rPr>
                         <a:t/>
@@ -4829,25 +4998,25 @@
                   <a:tcPr anchor="ctr" marL="73152" marR="73152">
                     <a:lnL w="9525" cap="flat" cmpd="sng" algn="ctr">
                       <a:solidFill>
-                        <a:srgbClr val="F8DFC9"/>
+                        <a:srgbClr val="F6E4D5"/>
                       </a:solidFill>
                       <a:prstDash val="solid"/>
                     </a:lnL>
                     <a:lnR w="9525" cap="flat" cmpd="sng" algn="ctr">
                       <a:solidFill>
-                        <a:srgbClr val="F8DFC9"/>
+                        <a:srgbClr val="F6E4D5"/>
                       </a:solidFill>
                       <a:prstDash val="solid"/>
                     </a:lnR>
                     <a:lnT w="9525" cap="flat" cmpd="sng" algn="ctr">
                       <a:solidFill>
-                        <a:srgbClr val="F8DFC9"/>
+                        <a:srgbClr val="F6E4D5"/>
                       </a:solidFill>
                       <a:prstDash val="solid"/>
                     </a:lnT>
                     <a:lnB w="9525" cap="flat" cmpd="sng" algn="ctr">
                       <a:solidFill>
-                        <a:srgbClr val="F8DFC9"/>
+                        <a:srgbClr val="F6E4D5"/>
                       </a:solidFill>
                       <a:prstDash val="solid"/>
                     </a:lnB>
@@ -4875,7 +5044,7 @@
     <p:bg>
       <p:bgPr>
         <a:solidFill>
-          <a:srgbClr val="FCF4ED"/>
+          <a:srgbClr val="FBF3EC"/>
         </a:solidFill>
         <a:effectLst/>
       </p:bgPr>
@@ -4895,14 +5064,14 @@
         </p:nvSpPr>
         <p:spPr>
           <a:xfrm>
-            <a:off x="0" y="0"/>
-            <a:ext cx="411480" cy="6858000"/>
+            <a:off x="640080" y="566928"/>
+            <a:ext cx="10911535" cy="10972"/>
           </a:xfrm>
           <a:prstGeom prst="rect">
             <a:avLst/>
           </a:prstGeom>
           <a:solidFill>
-            <a:srgbClr val="CA7021"/>
+            <a:srgbClr val="26231F"/>
           </a:solidFill>
           <a:ln>
             <a:noFill/>
@@ -4918,20 +5087,58 @@
       </p:sp>
       <p:sp>
         <p:nvSpPr>
-          <p:cNvPr id="4" name="장식"/>
-          <p:cNvSpPr/>
+          <p:cNvPr id="4" name="상단 라벨"/>
+          <p:cNvSpPr txBox="1"/>
           <p:nvPr/>
         </p:nvSpPr>
         <p:spPr>
           <a:xfrm>
-            <a:off x="411480" y="0"/>
-            <a:ext cx="64008" cy="6858000"/>
+            <a:off x="640080" y="237744"/>
+            <a:ext cx="5486400" cy="274320"/>
           </a:xfrm>
           <a:prstGeom prst="rect">
             <a:avLst/>
           </a:prstGeom>
+          <a:noFill/>
+        </p:spPr>
+        <p:txBody>
+          <a:bodyPr wrap="square" lIns="54864" rIns="54864" tIns="27432" bIns="27432" anchor="ctr">
+            <a:noAutofit/>
+          </a:bodyPr>
+          <a:lstStyle/>
+          <a:p>
+            <a:pPr algn="l">
+              <a:lnSpc>
+                <a:spcPct val="115000"/>
+              </a:lnSpc>
+            </a:pPr>
+            <a:r>
+              <a:rPr sz="900" b="1" i="0" spc="250">
+                <a:solidFill>
+                  <a:srgbClr val="26231F"/>
+                </a:solidFill>
+              </a:rPr>
+              <a:t>WEDDING</a:t>
+            </a:r>
+          </a:p>
+        </p:txBody>
+      </p:sp>
+      <p:sp>
+        <p:nvSpPr>
+          <p:cNvPr id="5" name="포인트"/>
+          <p:cNvSpPr/>
+          <p:nvPr/>
+        </p:nvSpPr>
+        <p:spPr>
+          <a:xfrm>
+            <a:off x="11204143" y="246888"/>
+            <a:ext cx="237744" cy="237744"/>
+          </a:xfrm>
+          <a:prstGeom prst="ellipse">
+            <a:avLst/>
+          </a:prstGeom>
           <a:solidFill>
-            <a:srgbClr val="3B918E"/>
+            <a:srgbClr val="D8A579"/>
           </a:solidFill>
           <a:ln>
             <a:noFill/>
@@ -4957,8 +5164,8 @@
         </p:nvSpPr>
         <p:spPr>
           <a:xfrm>
-            <a:off x="914400" y="457200"/>
-            <a:ext cx="9448495" cy="868680"/>
+            <a:off x="640080" y="731520"/>
+            <a:ext cx="10911535" cy="822960"/>
           </a:xfrm>
         </p:spPr>
         <p:txBody>
@@ -4975,7 +5182,7 @@
             <a:r>
               <a:rPr sz="3000" b="1" i="0">
                 <a:solidFill>
-                  <a:srgbClr val="723F13"/>
+                  <a:srgbClr val="26231F"/>
                 </a:solidFill>
               </a:rPr>
               <a:t>하객 안내</a:t>
@@ -4985,27 +5192,25 @@
       </p:sp>
       <p:sp>
         <p:nvSpPr>
-          <p:cNvPr id="5" name="카드 1"/>
+          <p:cNvPr id="6" name="카드 1"/>
           <p:cNvSpPr/>
           <p:nvPr/>
         </p:nvSpPr>
         <p:spPr>
           <a:xfrm>
-            <a:off x="914400" y="1600200"/>
-            <a:ext cx="3393338" cy="4800600"/>
+            <a:off x="640080" y="1783080"/>
+            <a:ext cx="3484778" cy="4572000"/>
           </a:xfrm>
           <a:prstGeom prst="roundRect">
             <a:avLst>
-              <a:gd name="adj" fmla="val 8000"/>
+              <a:gd name="adj" fmla="val 7000"/>
             </a:avLst>
           </a:prstGeom>
           <a:solidFill>
-            <a:srgbClr val="FCF4ED"/>
+            <a:srgbClr val="FBF3EC"/>
           </a:solidFill>
-          <a:ln w="15875">
-            <a:solidFill>
-              <a:srgbClr val="F8DFC9"/>
-            </a:solidFill>
+          <a:ln>
+            <a:noFill/>
           </a:ln>
         </p:spPr>
         <p:txBody>
@@ -5018,20 +5223,20 @@
       </p:sp>
       <p:sp>
         <p:nvSpPr>
-          <p:cNvPr id="6" name="번호 1"/>
+          <p:cNvPr id="7" name="번호 1"/>
           <p:cNvSpPr/>
           <p:nvPr/>
         </p:nvSpPr>
         <p:spPr>
           <a:xfrm>
-            <a:off x="1097280" y="1783080"/>
+            <a:off x="822959" y="1965960"/>
             <a:ext cx="457200" cy="457200"/>
           </a:xfrm>
           <a:prstGeom prst="ellipse">
             <a:avLst/>
           </a:prstGeom>
           <a:solidFill>
-            <a:srgbClr val="CA7021"/>
+            <a:srgbClr val="D8A579"/>
           </a:solidFill>
           <a:ln>
             <a:noFill/>
@@ -5051,7 +5256,7 @@
             <a:r>
               <a:rPr sz="1600" b="1" i="0">
                 <a:solidFill>
-                  <a:srgbClr val="FFFFFF"/>
+                  <a:srgbClr val="26231F"/>
                 </a:solidFill>
               </a:rPr>
               <a:t>1</a:t>
@@ -5061,14 +5266,14 @@
       </p:sp>
       <p:sp>
         <p:nvSpPr>
-          <p:cNvPr id="7" name="TextBox 6"/>
+          <p:cNvPr id="8" name="TextBox 7"/>
           <p:cNvSpPr txBox="1"/>
           <p:nvPr/>
         </p:nvSpPr>
         <p:spPr>
           <a:xfrm>
-            <a:off x="1051560" y="2377440"/>
-            <a:ext cx="3119018" cy="640080"/>
+            <a:off x="777240" y="2560320"/>
+            <a:ext cx="3210458" cy="640080"/>
           </a:xfrm>
           <a:prstGeom prst="rect">
             <a:avLst/>
@@ -5089,7 +5294,7 @@
             <a:r>
               <a:rPr sz="1800" b="1" i="0">
                 <a:solidFill>
-                  <a:srgbClr val="723F13"/>
+                  <a:srgbClr val="493727"/>
                 </a:solidFill>
               </a:rPr>
               <a:t>주차 안내</a:t>
@@ -5099,14 +5304,14 @@
       </p:sp>
       <p:sp>
         <p:nvSpPr>
-          <p:cNvPr id="8" name="TextBox 7"/>
+          <p:cNvPr id="9" name="TextBox 8"/>
           <p:cNvSpPr txBox="1"/>
           <p:nvPr/>
         </p:nvSpPr>
         <p:spPr>
           <a:xfrm>
-            <a:off x="1051560" y="3063240"/>
-            <a:ext cx="3119018" cy="3200400"/>
+            <a:off x="777240" y="3246120"/>
+            <a:ext cx="3210458" cy="2971800"/>
           </a:xfrm>
           <a:prstGeom prst="rect">
             <a:avLst/>
@@ -5127,7 +5332,7 @@
             <a:r>
               <a:rPr sz="1500" b="0" i="0">
                 <a:solidFill>
-                  <a:srgbClr val="2B2B2B"/>
+                  <a:srgbClr val="26231F"/>
                 </a:solidFill>
               </a:rPr>
               <a:t>입력하세요</a:t>
@@ -5137,27 +5342,25 @@
       </p:sp>
       <p:sp>
         <p:nvSpPr>
-          <p:cNvPr id="9" name="카드 2"/>
+          <p:cNvPr id="10" name="카드 2"/>
           <p:cNvSpPr/>
           <p:nvPr/>
         </p:nvSpPr>
         <p:spPr>
           <a:xfrm>
-            <a:off x="4536338" y="1600200"/>
-            <a:ext cx="3393338" cy="4800600"/>
+            <a:off x="4353458" y="1783080"/>
+            <a:ext cx="3484778" cy="4572000"/>
           </a:xfrm>
           <a:prstGeom prst="roundRect">
             <a:avLst>
-              <a:gd name="adj" fmla="val 8000"/>
+              <a:gd name="adj" fmla="val 7000"/>
             </a:avLst>
           </a:prstGeom>
           <a:solidFill>
-            <a:srgbClr val="FCF4ED"/>
+            <a:srgbClr val="FBF3EC"/>
           </a:solidFill>
-          <a:ln w="15875">
-            <a:solidFill>
-              <a:srgbClr val="F8DFC9"/>
-            </a:solidFill>
+          <a:ln>
+            <a:noFill/>
           </a:ln>
         </p:spPr>
         <p:txBody>
@@ -5170,20 +5373,20 @@
       </p:sp>
       <p:sp>
         <p:nvSpPr>
-          <p:cNvPr id="10" name="번호 2"/>
+          <p:cNvPr id="11" name="번호 2"/>
           <p:cNvSpPr/>
           <p:nvPr/>
         </p:nvSpPr>
         <p:spPr>
           <a:xfrm>
-            <a:off x="4719218" y="1783080"/>
+            <a:off x="4536338" y="1965960"/>
             <a:ext cx="457200" cy="457200"/>
           </a:xfrm>
           <a:prstGeom prst="ellipse">
             <a:avLst/>
           </a:prstGeom>
           <a:solidFill>
-            <a:srgbClr val="CA7021"/>
+            <a:srgbClr val="D8A579"/>
           </a:solidFill>
           <a:ln>
             <a:noFill/>
@@ -5203,7 +5406,7 @@
             <a:r>
               <a:rPr sz="1600" b="1" i="0">
                 <a:solidFill>
-                  <a:srgbClr val="FFFFFF"/>
+                  <a:srgbClr val="26231F"/>
                 </a:solidFill>
               </a:rPr>
               <a:t>2</a:t>
@@ -5213,14 +5416,14 @@
       </p:sp>
       <p:sp>
         <p:nvSpPr>
-          <p:cNvPr id="11" name="TextBox 10"/>
+          <p:cNvPr id="12" name="TextBox 11"/>
           <p:cNvSpPr txBox="1"/>
           <p:nvPr/>
         </p:nvSpPr>
         <p:spPr>
           <a:xfrm>
-            <a:off x="4673498" y="2377440"/>
-            <a:ext cx="3119018" cy="640080"/>
+            <a:off x="4490618" y="2560320"/>
+            <a:ext cx="3210458" cy="640080"/>
           </a:xfrm>
           <a:prstGeom prst="rect">
             <a:avLst/>
@@ -5241,7 +5444,7 @@
             <a:r>
               <a:rPr sz="1800" b="1" i="0">
                 <a:solidFill>
-                  <a:srgbClr val="723F13"/>
+                  <a:srgbClr val="493727"/>
                 </a:solidFill>
               </a:rPr>
               <a:t>식사 안내</a:t>
@@ -5251,14 +5454,14 @@
       </p:sp>
       <p:sp>
         <p:nvSpPr>
-          <p:cNvPr id="12" name="TextBox 11"/>
+          <p:cNvPr id="13" name="TextBox 12"/>
           <p:cNvSpPr txBox="1"/>
           <p:nvPr/>
         </p:nvSpPr>
         <p:spPr>
           <a:xfrm>
-            <a:off x="4673498" y="3063240"/>
-            <a:ext cx="3119018" cy="3200400"/>
+            <a:off x="4490618" y="3246120"/>
+            <a:ext cx="3210458" cy="2971800"/>
           </a:xfrm>
           <a:prstGeom prst="rect">
             <a:avLst/>
@@ -5279,7 +5482,7 @@
             <a:r>
               <a:rPr sz="1500" b="0" i="0">
                 <a:solidFill>
-                  <a:srgbClr val="2B2B2B"/>
+                  <a:srgbClr val="26231F"/>
                 </a:solidFill>
               </a:rPr>
               <a:t>입력하세요</a:t>
@@ -5289,27 +5492,25 @@
       </p:sp>
       <p:sp>
         <p:nvSpPr>
-          <p:cNvPr id="13" name="카드 3"/>
+          <p:cNvPr id="14" name="카드 3"/>
           <p:cNvSpPr/>
           <p:nvPr/>
         </p:nvSpPr>
         <p:spPr>
           <a:xfrm>
-            <a:off x="8158276" y="1600200"/>
-            <a:ext cx="3393338" cy="4800600"/>
+            <a:off x="8066836" y="1783080"/>
+            <a:ext cx="3484778" cy="4572000"/>
           </a:xfrm>
           <a:prstGeom prst="roundRect">
             <a:avLst>
-              <a:gd name="adj" fmla="val 8000"/>
+              <a:gd name="adj" fmla="val 7000"/>
             </a:avLst>
           </a:prstGeom>
           <a:solidFill>
-            <a:srgbClr val="FCF4ED"/>
+            <a:srgbClr val="FBF3EC"/>
           </a:solidFill>
-          <a:ln w="15875">
-            <a:solidFill>
-              <a:srgbClr val="F8DFC9"/>
-            </a:solidFill>
+          <a:ln>
+            <a:noFill/>
           </a:ln>
         </p:spPr>
         <p:txBody>
@@ -5322,20 +5523,20 @@
       </p:sp>
       <p:sp>
         <p:nvSpPr>
-          <p:cNvPr id="14" name="번호 3"/>
+          <p:cNvPr id="15" name="번호 3"/>
           <p:cNvSpPr/>
           <p:nvPr/>
         </p:nvSpPr>
         <p:spPr>
           <a:xfrm>
-            <a:off x="8341156" y="1783080"/>
+            <a:off x="8249716" y="1965960"/>
             <a:ext cx="457200" cy="457200"/>
           </a:xfrm>
           <a:prstGeom prst="ellipse">
             <a:avLst/>
           </a:prstGeom>
           <a:solidFill>
-            <a:srgbClr val="CA7021"/>
+            <a:srgbClr val="D8A579"/>
           </a:solidFill>
           <a:ln>
             <a:noFill/>
@@ -5355,7 +5556,7 @@
             <a:r>
               <a:rPr sz="1600" b="1" i="0">
                 <a:solidFill>
-                  <a:srgbClr val="FFFFFF"/>
+                  <a:srgbClr val="26231F"/>
                 </a:solidFill>
               </a:rPr>
               <a:t>3</a:t>
@@ -5365,14 +5566,14 @@
       </p:sp>
       <p:sp>
         <p:nvSpPr>
-          <p:cNvPr id="15" name="TextBox 14"/>
+          <p:cNvPr id="16" name="TextBox 15"/>
           <p:cNvSpPr txBox="1"/>
           <p:nvPr/>
         </p:nvSpPr>
         <p:spPr>
           <a:xfrm>
-            <a:off x="8295436" y="2377440"/>
-            <a:ext cx="3119018" cy="640080"/>
+            <a:off x="8203996" y="2560320"/>
+            <a:ext cx="3210458" cy="640080"/>
           </a:xfrm>
           <a:prstGeom prst="rect">
             <a:avLst/>
@@ -5393,7 +5594,7 @@
             <a:r>
               <a:rPr sz="1800" b="1" i="0">
                 <a:solidFill>
-                  <a:srgbClr val="723F13"/>
+                  <a:srgbClr val="493727"/>
                 </a:solidFill>
               </a:rPr>
               <a:t>기념 촬영</a:t>
@@ -5403,14 +5604,14 @@
       </p:sp>
       <p:sp>
         <p:nvSpPr>
-          <p:cNvPr id="16" name="TextBox 15"/>
+          <p:cNvPr id="17" name="TextBox 16"/>
           <p:cNvSpPr txBox="1"/>
           <p:nvPr/>
         </p:nvSpPr>
         <p:spPr>
           <a:xfrm>
-            <a:off x="8295436" y="3063240"/>
-            <a:ext cx="3119018" cy="3200400"/>
+            <a:off x="8203996" y="3246120"/>
+            <a:ext cx="3210458" cy="2971800"/>
           </a:xfrm>
           <a:prstGeom prst="rect">
             <a:avLst/>
@@ -5431,7 +5632,7 @@
             <a:r>
               <a:rPr sz="1500" b="0" i="0">
                 <a:solidFill>
-                  <a:srgbClr val="2B2B2B"/>
+                  <a:srgbClr val="26231F"/>
                 </a:solidFill>
               </a:rPr>
               <a:t>입력하세요</a:t>
@@ -5453,7 +5654,7 @@
     <p:bg>
       <p:bgPr>
         <a:solidFill>
-          <a:srgbClr val="FCF4ED"/>
+          <a:srgbClr val="FBF3EC"/>
         </a:solidFill>
         <a:effectLst/>
       </p:bgPr>
@@ -5473,14 +5674,14 @@
         </p:nvSpPr>
         <p:spPr>
           <a:xfrm>
-            <a:off x="0" y="0"/>
-            <a:ext cx="411480" cy="6858000"/>
+            <a:off x="640080" y="566928"/>
+            <a:ext cx="10911535" cy="10972"/>
           </a:xfrm>
           <a:prstGeom prst="rect">
             <a:avLst/>
           </a:prstGeom>
           <a:solidFill>
-            <a:srgbClr val="CA7021"/>
+            <a:srgbClr val="26231F"/>
           </a:solidFill>
           <a:ln>
             <a:noFill/>
@@ -5496,20 +5697,58 @@
       </p:sp>
       <p:sp>
         <p:nvSpPr>
-          <p:cNvPr id="4" name="장식"/>
-          <p:cNvSpPr/>
+          <p:cNvPr id="4" name="상단 라벨"/>
+          <p:cNvSpPr txBox="1"/>
           <p:nvPr/>
         </p:nvSpPr>
         <p:spPr>
           <a:xfrm>
-            <a:off x="411480" y="0"/>
-            <a:ext cx="64008" cy="6858000"/>
+            <a:off x="640080" y="237744"/>
+            <a:ext cx="5486400" cy="274320"/>
           </a:xfrm>
           <a:prstGeom prst="rect">
             <a:avLst/>
           </a:prstGeom>
+          <a:noFill/>
+        </p:spPr>
+        <p:txBody>
+          <a:bodyPr wrap="square" lIns="54864" rIns="54864" tIns="27432" bIns="27432" anchor="ctr">
+            <a:noAutofit/>
+          </a:bodyPr>
+          <a:lstStyle/>
+          <a:p>
+            <a:pPr algn="l">
+              <a:lnSpc>
+                <a:spcPct val="115000"/>
+              </a:lnSpc>
+            </a:pPr>
+            <a:r>
+              <a:rPr sz="900" b="1" i="0" spc="250">
+                <a:solidFill>
+                  <a:srgbClr val="26231F"/>
+                </a:solidFill>
+              </a:rPr>
+              <a:t>WEDDING</a:t>
+            </a:r>
+          </a:p>
+        </p:txBody>
+      </p:sp>
+      <p:sp>
+        <p:nvSpPr>
+          <p:cNvPr id="5" name="포인트"/>
+          <p:cNvSpPr/>
+          <p:nvPr/>
+        </p:nvSpPr>
+        <p:spPr>
+          <a:xfrm>
+            <a:off x="11204143" y="246888"/>
+            <a:ext cx="237744" cy="237744"/>
+          </a:xfrm>
+          <a:prstGeom prst="ellipse">
+            <a:avLst/>
+          </a:prstGeom>
           <a:solidFill>
-            <a:srgbClr val="3B918E"/>
+            <a:srgbClr val="D8A579"/>
           </a:solidFill>
           <a:ln>
             <a:noFill/>
@@ -5535,8 +5774,8 @@
         </p:nvSpPr>
         <p:spPr>
           <a:xfrm>
-            <a:off x="914400" y="457200"/>
-            <a:ext cx="9448495" cy="868680"/>
+            <a:off x="640080" y="731520"/>
+            <a:ext cx="10911535" cy="822960"/>
           </a:xfrm>
         </p:spPr>
         <p:txBody>
@@ -5553,7 +5792,7 @@
             <a:r>
               <a:rPr sz="3000" b="1" i="0">
                 <a:solidFill>
-                  <a:srgbClr val="723F13"/>
+                  <a:srgbClr val="26231F"/>
                 </a:solidFill>
               </a:rPr>
               <a:t>웨딩 사진</a:t>
@@ -5563,14 +5802,14 @@
       </p:sp>
       <p:sp>
         <p:nvSpPr>
-          <p:cNvPr id="5" name="사진 자리"/>
+          <p:cNvPr id="6" name="사진 자리"/>
           <p:cNvSpPr/>
           <p:nvPr/>
         </p:nvSpPr>
         <p:spPr>
           <a:xfrm>
-            <a:off x="914400" y="1600200"/>
-            <a:ext cx="3423818" cy="2308860"/>
+            <a:off x="640080" y="1783080"/>
+            <a:ext cx="3515258" cy="2194560"/>
           </a:xfrm>
           <a:prstGeom prst="roundRect">
             <a:avLst>
@@ -5578,12 +5817,10 @@
             </a:avLst>
           </a:prstGeom>
           <a:solidFill>
-            <a:srgbClr val="F8DFC9"/>
+            <a:srgbClr val="F6E4D5"/>
           </a:solidFill>
           <a:ln w="19050">
-            <a:solidFill>
-              <a:srgbClr val="CA7021"/>
-            </a:solidFill>
+            <a:noFill/>
             <a:prstDash val="dash"/>
           </a:ln>
         </p:spPr>
@@ -5601,7 +5838,7 @@
             <a:r>
               <a:rPr sz="1200" b="0" i="0">
                 <a:solidFill>
-                  <a:srgbClr val="723F13"/>
+                  <a:srgbClr val="8E8780"/>
                 </a:solidFill>
               </a:rPr>
               <a:t>사진 1</a:t>
@@ -5611,14 +5848,14 @@
       </p:sp>
       <p:sp>
         <p:nvSpPr>
-          <p:cNvPr id="6" name="사진 자리"/>
+          <p:cNvPr id="7" name="사진 자리"/>
           <p:cNvSpPr/>
           <p:nvPr/>
         </p:nvSpPr>
         <p:spPr>
           <a:xfrm>
-            <a:off x="4521098" y="1600200"/>
-            <a:ext cx="3423818" cy="2308860"/>
+            <a:off x="4338218" y="1783080"/>
+            <a:ext cx="3515258" cy="2194560"/>
           </a:xfrm>
           <a:prstGeom prst="roundRect">
             <a:avLst>
@@ -5626,12 +5863,10 @@
             </a:avLst>
           </a:prstGeom>
           <a:solidFill>
-            <a:srgbClr val="F8DFC9"/>
+            <a:srgbClr val="F6E4D5"/>
           </a:solidFill>
           <a:ln w="19050">
-            <a:solidFill>
-              <a:srgbClr val="CA7021"/>
-            </a:solidFill>
+            <a:noFill/>
             <a:prstDash val="dash"/>
           </a:ln>
         </p:spPr>
@@ -5649,7 +5884,7 @@
             <a:r>
               <a:rPr sz="1200" b="0" i="0">
                 <a:solidFill>
-                  <a:srgbClr val="723F13"/>
+                  <a:srgbClr val="8E8780"/>
                 </a:solidFill>
               </a:rPr>
               <a:t>사진 2</a:t>
@@ -5659,14 +5894,14 @@
       </p:sp>
       <p:sp>
         <p:nvSpPr>
-          <p:cNvPr id="7" name="사진 자리"/>
+          <p:cNvPr id="8" name="사진 자리"/>
           <p:cNvSpPr/>
           <p:nvPr/>
         </p:nvSpPr>
         <p:spPr>
           <a:xfrm>
-            <a:off x="8127796" y="1600200"/>
-            <a:ext cx="3423818" cy="2308860"/>
+            <a:off x="8036356" y="1783080"/>
+            <a:ext cx="3515258" cy="2194560"/>
           </a:xfrm>
           <a:prstGeom prst="roundRect">
             <a:avLst>
@@ -5674,12 +5909,10 @@
             </a:avLst>
           </a:prstGeom>
           <a:solidFill>
-            <a:srgbClr val="F8DFC9"/>
+            <a:srgbClr val="F6E4D5"/>
           </a:solidFill>
           <a:ln w="19050">
-            <a:solidFill>
-              <a:srgbClr val="CA7021"/>
-            </a:solidFill>
+            <a:noFill/>
             <a:prstDash val="dash"/>
           </a:ln>
         </p:spPr>
@@ -5697,7 +5930,7 @@
             <a:r>
               <a:rPr sz="1200" b="0" i="0">
                 <a:solidFill>
-                  <a:srgbClr val="723F13"/>
+                  <a:srgbClr val="8E8780"/>
                 </a:solidFill>
               </a:rPr>
               <a:t>사진 3</a:t>
@@ -5707,14 +5940,14 @@
       </p:sp>
       <p:sp>
         <p:nvSpPr>
-          <p:cNvPr id="8" name="사진 자리"/>
+          <p:cNvPr id="9" name="사진 자리"/>
           <p:cNvSpPr/>
           <p:nvPr/>
         </p:nvSpPr>
         <p:spPr>
           <a:xfrm>
-            <a:off x="914400" y="4091939"/>
-            <a:ext cx="3423818" cy="2308860"/>
+            <a:off x="640080" y="4160520"/>
+            <a:ext cx="3515258" cy="2194560"/>
           </a:xfrm>
           <a:prstGeom prst="roundRect">
             <a:avLst>
@@ -5722,12 +5955,10 @@
             </a:avLst>
           </a:prstGeom>
           <a:solidFill>
-            <a:srgbClr val="F8DFC9"/>
+            <a:srgbClr val="F6E4D5"/>
           </a:solidFill>
           <a:ln w="19050">
-            <a:solidFill>
-              <a:srgbClr val="CA7021"/>
-            </a:solidFill>
+            <a:noFill/>
             <a:prstDash val="dash"/>
           </a:ln>
         </p:spPr>
@@ -5745,7 +5976,7 @@
             <a:r>
               <a:rPr sz="1200" b="0" i="0">
                 <a:solidFill>
-                  <a:srgbClr val="723F13"/>
+                  <a:srgbClr val="8E8780"/>
                 </a:solidFill>
               </a:rPr>
               <a:t>사진 4</a:t>
@@ -5755,14 +5986,14 @@
       </p:sp>
       <p:sp>
         <p:nvSpPr>
-          <p:cNvPr id="9" name="사진 자리"/>
+          <p:cNvPr id="10" name="사진 자리"/>
           <p:cNvSpPr/>
           <p:nvPr/>
         </p:nvSpPr>
         <p:spPr>
           <a:xfrm>
-            <a:off x="4521098" y="4091939"/>
-            <a:ext cx="3423818" cy="2308860"/>
+            <a:off x="4338218" y="4160520"/>
+            <a:ext cx="3515258" cy="2194560"/>
           </a:xfrm>
           <a:prstGeom prst="roundRect">
             <a:avLst>
@@ -5770,12 +6001,10 @@
             </a:avLst>
           </a:prstGeom>
           <a:solidFill>
-            <a:srgbClr val="F8DFC9"/>
+            <a:srgbClr val="F6E4D5"/>
           </a:solidFill>
           <a:ln w="19050">
-            <a:solidFill>
-              <a:srgbClr val="CA7021"/>
-            </a:solidFill>
+            <a:noFill/>
             <a:prstDash val="dash"/>
           </a:ln>
         </p:spPr>
@@ -5793,7 +6022,7 @@
             <a:r>
               <a:rPr sz="1200" b="0" i="0">
                 <a:solidFill>
-                  <a:srgbClr val="723F13"/>
+                  <a:srgbClr val="8E8780"/>
                 </a:solidFill>
               </a:rPr>
               <a:t>사진 5</a:t>
@@ -5803,14 +6032,14 @@
       </p:sp>
       <p:sp>
         <p:nvSpPr>
-          <p:cNvPr id="10" name="사진 자리"/>
+          <p:cNvPr id="11" name="사진 자리"/>
           <p:cNvSpPr/>
           <p:nvPr/>
         </p:nvSpPr>
         <p:spPr>
           <a:xfrm>
-            <a:off x="8127796" y="4091939"/>
-            <a:ext cx="3423818" cy="2308860"/>
+            <a:off x="8036356" y="4160520"/>
+            <a:ext cx="3515258" cy="2194560"/>
           </a:xfrm>
           <a:prstGeom prst="roundRect">
             <a:avLst>
@@ -5818,12 +6047,10 @@
             </a:avLst>
           </a:prstGeom>
           <a:solidFill>
-            <a:srgbClr val="F8DFC9"/>
+            <a:srgbClr val="F6E4D5"/>
           </a:solidFill>
           <a:ln w="19050">
-            <a:solidFill>
-              <a:srgbClr val="CA7021"/>
-            </a:solidFill>
+            <a:noFill/>
             <a:prstDash val="dash"/>
           </a:ln>
         </p:spPr>
@@ -5841,7 +6068,7 @@
             <a:r>
               <a:rPr sz="1200" b="0" i="0">
                 <a:solidFill>
-                  <a:srgbClr val="723F13"/>
+                  <a:srgbClr val="8E8780"/>
                 </a:solidFill>
               </a:rPr>
               <a:t>사진 6</a:t>
@@ -5860,6 +6087,14 @@
 <file path=ppt/slides/slide6.xml><?xml version="1.0" encoding="utf-8"?>
 <p:sld xmlns:a="http://schemas.openxmlformats.org/drawingml/2006/main" xmlns:p="http://schemas.openxmlformats.org/presentationml/2006/main" xmlns:r="http://schemas.openxmlformats.org/officeDocument/2006/relationships">
   <p:cSld>
+    <p:bg>
+      <p:bgPr>
+        <a:solidFill>
+          <a:srgbClr val="FBF3EC"/>
+        </a:solidFill>
+        <a:effectLst/>
+      </p:bgPr>
+    </p:bg>
     <p:spTree>
       <p:nvGrpSpPr>
         <p:cNvPr id="1" name=""/>
@@ -5867,30 +6102,119 @@
         <p:nvPr/>
       </p:nvGrpSpPr>
       <p:grpSpPr/>
-      <p:pic>
-        <p:nvPicPr>
-          <p:cNvPr id="3" name="표지 그림" descr="wedding-28.jpg"/>
-          <p:cNvPicPr>
-            <a:picLocks noChangeAspect="1"/>
-          </p:cNvPicPr>
+      <p:sp>
+        <p:nvSpPr>
+          <p:cNvPr id="3" name="사진 자리"/>
+          <p:cNvSpPr/>
           <p:nvPr/>
-        </p:nvPicPr>
-        <p:blipFill>
-          <a:blip r:embed="rId2"/>
-          <a:stretch>
-            <a:fillRect/>
-          </a:stretch>
-        </p:blipFill>
-        <p:spPr>
-          <a:xfrm>
-            <a:off x="0" y="0"/>
-            <a:ext cx="12191695" cy="6858000"/>
+        </p:nvSpPr>
+        <p:spPr>
+          <a:xfrm>
+            <a:off x="7558851" y="685800"/>
+            <a:ext cx="3169840" cy="5486400"/>
+          </a:xfrm>
+          <a:prstGeom prst="round2SameRect">
+            <a:avLst>
+              <a:gd name="adj1" fmla="val 50000"/>
+              <a:gd name="adj2" fmla="val 0"/>
+            </a:avLst>
+          </a:prstGeom>
+          <a:solidFill>
+            <a:srgbClr val="EBCAAD"/>
+          </a:solidFill>
+          <a:ln>
+            <a:noFill/>
+          </a:ln>
+        </p:spPr>
+        <p:txBody>
+          <a:bodyPr rtlCol="0" anchor="ctr" wrap="square" lIns="54864" rIns="54864" tIns="27432" bIns="27432">
+            <a:noAutofit/>
+          </a:bodyPr>
+          <a:lstStyle/>
+          <a:p>
+            <a:pPr algn="ctr">
+              <a:lnSpc>
+                <a:spcPct val="100000"/>
+              </a:lnSpc>
+            </a:pPr>
+            <a:r>
+              <a:rPr sz="1400" b="0" i="0">
+                <a:solidFill>
+                  <a:srgbClr val="493727"/>
+                </a:solidFill>
+              </a:rPr>
+              <a:t>사진을 넣어 주세요</a:t>
+            </a:r>
+          </a:p>
+        </p:txBody>
+      </p:sp>
+      <p:sp>
+        <p:nvSpPr>
+          <p:cNvPr id="4" name="장식"/>
+          <p:cNvSpPr/>
+          <p:nvPr/>
+        </p:nvSpPr>
+        <p:spPr>
+          <a:xfrm>
+            <a:off x="6827349" y="4251960"/>
+            <a:ext cx="1005840" cy="1005840"/>
+          </a:xfrm>
+          <a:prstGeom prst="ellipse">
+            <a:avLst/>
+          </a:prstGeom>
+          <a:solidFill>
+            <a:srgbClr val="EBCAAD"/>
+          </a:solidFill>
+          <a:ln>
+            <a:noFill/>
+          </a:ln>
+        </p:spPr>
+        <p:txBody>
+          <a:bodyPr rtlCol="0" anchor="ctr"/>
+          <a:lstStyle/>
+          <a:p>
+            <a:pPr algn="ctr"/>
+          </a:p>
+        </p:txBody>
+      </p:sp>
+      <p:sp>
+        <p:nvSpPr>
+          <p:cNvPr id="5" name="라벨"/>
+          <p:cNvSpPr txBox="1"/>
+          <p:nvPr/>
+        </p:nvSpPr>
+        <p:spPr>
+          <a:xfrm>
+            <a:off x="822960" y="2148840"/>
+            <a:ext cx="5608179" cy="274320"/>
           </a:xfrm>
           <a:prstGeom prst="rect">
             <a:avLst/>
           </a:prstGeom>
-        </p:spPr>
-      </p:pic>
+          <a:noFill/>
+        </p:spPr>
+        <p:txBody>
+          <a:bodyPr wrap="square" lIns="54864" rIns="54864" tIns="27432" bIns="27432" anchor="t">
+            <a:noAutofit/>
+          </a:bodyPr>
+          <a:lstStyle/>
+          <a:p>
+            <a:pPr algn="l">
+              <a:lnSpc>
+                <a:spcPct val="115000"/>
+              </a:lnSpc>
+            </a:pPr>
+            <a:r>
+              <a:rPr sz="1000" b="1" i="0" spc="250">
+                <a:solidFill>
+                  <a:srgbClr val="26231F"/>
+                </a:solidFill>
+              </a:rPr>
+              <a:t>WEDDING</a:t>
+            </a:r>
+          </a:p>
+        </p:txBody>
+      </p:sp>
       <p:sp>
         <p:nvSpPr>
           <p:cNvPr id="2" name="Title 1"/>
@@ -5903,8 +6227,8 @@
         </p:nvSpPr>
         <p:spPr>
           <a:xfrm>
-            <a:off x="853418" y="2057400"/>
-            <a:ext cx="6095847" cy="1554480"/>
+            <a:off x="822960" y="2606040"/>
+            <a:ext cx="5608179" cy="1188720"/>
           </a:xfrm>
         </p:spPr>
         <p:txBody>
@@ -5921,7 +6245,7 @@
             <a:r>
               <a:rPr sz="3400" b="1" i="0">
                 <a:solidFill>
-                  <a:srgbClr val="723F13"/>
+                  <a:srgbClr val="26231F"/>
                 </a:solidFill>
               </a:rPr>
               <a:t>와 주셔서 고맙습니다</a:t>
@@ -5931,14 +6255,14 @@
       </p:sp>
       <p:sp>
         <p:nvSpPr>
-          <p:cNvPr id="4" name="한 줄 문구"/>
+          <p:cNvPr id="6" name="한 줄 문구"/>
           <p:cNvSpPr txBox="1"/>
           <p:nvPr/>
         </p:nvSpPr>
         <p:spPr>
           <a:xfrm>
-            <a:off x="853418" y="3749039"/>
-            <a:ext cx="6095847" cy="822960"/>
+            <a:off x="822960" y="3886200"/>
+            <a:ext cx="5608179" cy="822960"/>
           </a:xfrm>
           <a:prstGeom prst="rect">
             <a:avLst/>
@@ -5957,9 +6281,9 @@
               </a:lnSpc>
             </a:pPr>
             <a:r>
-              <a:rPr sz="1700" b="0" i="1">
+              <a:rPr sz="1700" b="0" i="0">
                 <a:solidFill>
-                  <a:srgbClr val="723F13"/>
+                  <a:srgbClr val="26231F"/>
                 </a:solidFill>
               </a:rPr>
               <a:t>잘 살겠습니다</a:t>
@@ -5969,14 +6293,14 @@
       </p:sp>
       <p:sp>
         <p:nvSpPr>
-          <p:cNvPr id="5" name="안내 문구"/>
+          <p:cNvPr id="7" name="안내 문구"/>
           <p:cNvSpPr txBox="1"/>
           <p:nvPr/>
         </p:nvSpPr>
         <p:spPr>
           <a:xfrm>
-            <a:off x="853418" y="4617720"/>
-            <a:ext cx="6095847" cy="914400"/>
+            <a:off x="822960" y="4754880"/>
+            <a:ext cx="5608179" cy="914400"/>
           </a:xfrm>
           <a:prstGeom prst="rect">
             <a:avLst/>
@@ -5997,7 +6321,7 @@
             <a:r>
               <a:rPr sz="1400" b="0" i="0">
                 <a:solidFill>
-                  <a:srgbClr val="666666"/>
+                  <a:srgbClr val="26231F"/>
                 </a:solidFill>
               </a:rPr>
               <a:t>신랑 이름 ♥ 신부 이름</a:t>
@@ -6024,34 +6348,34 @@
         <a:sysClr val="window" lastClr="FFFFFF"/>
       </a:lt1>
       <a:dk2>
-        <a:srgbClr val="723F13"/>
+        <a:srgbClr val="493727"/>
       </a:dk2>
       <a:lt2>
-        <a:srgbClr val="FCF4ED"/>
+        <a:srgbClr val="FBF3EC"/>
       </a:lt2>
       <a:accent1>
-        <a:srgbClr val="CA7021"/>
+        <a:srgbClr val="D8A579"/>
       </a:accent1>
       <a:accent2>
-        <a:srgbClr val="3B918E"/>
+        <a:srgbClr val="E1DC98"/>
       </a:accent2>
       <a:accent3>
-        <a:srgbClr val="723F13"/>
+        <a:srgbClr val="493727"/>
       </a:accent3>
       <a:accent4>
-        <a:srgbClr val="F8DFC9"/>
+        <a:srgbClr val="F6E4D5"/>
       </a:accent4>
       <a:accent5>
-        <a:srgbClr val="828058"/>
+        <a:srgbClr val="DCC088"/>
       </a:accent5>
       <a:accent6>
-        <a:srgbClr val="AA8C71"/>
+        <a:srgbClr val="92877D"/>
       </a:accent6>
       <a:hlink>
-        <a:srgbClr val="CA7021"/>
+        <a:srgbClr val="D8A579"/>
       </a:hlink>
       <a:folHlink>
-        <a:srgbClr val="723F13"/>
+        <a:srgbClr val="493727"/>
       </a:folHlink>
     </a:clrScheme>
     <a:fontScheme name="Office">
